--- a/納品レポート/ホテル別レポート/京成リッチモンドホテル東京錦糸町_口コミ分析レポート.pptx
+++ b/納品レポート/ホテル別レポート/京成リッチモンドホテル東京錦糸町_口コミ分析レポート.pptx
@@ -2657,7 +2657,7 @@
                 <a:ea typeface="Arial" pitchFamily="34" charset="-122"/>
                 <a:cs typeface="Arial" pitchFamily="34" charset="-120"/>
               </a:rPr>
-              <a:t>分析対象期間：2025年12月〜2026年3月</a:t>
+              <a:t>分析対象期間：2025年12月〜2026年4月</a:t>
             </a:r>
             <a:endParaRPr lang="en-US" sz="1000" dirty="0"/>
           </a:p>
@@ -2697,7 +2697,7 @@
                 <a:ea typeface="Arial" pitchFamily="34" charset="-122"/>
                 <a:cs typeface="Arial" pitchFamily="34" charset="-120"/>
               </a:rPr>
-              <a:t>作成日：2026年4月3日</a:t>
+              <a:t>作成日：2026年4月12日</a:t>
             </a:r>
             <a:endParaRPr lang="en-US" sz="1000" dirty="0"/>
           </a:p>
@@ -2876,7 +2876,7 @@
                 <a:ea typeface="Arial" pitchFamily="34" charset="-122"/>
                 <a:cs typeface="Arial" pitchFamily="34" charset="-120"/>
               </a:rPr>
-              <a:t>京成リッチモンドホテル東京錦糸町の2025年12月〜2026年3月口コミ分析（67件）では、総合評価9.24点（10pt換算）、高評価率92.5%という結果が得られました。</a:t>
+              <a:t>京成リッチモンドホテル東京錦糸町の2025年12月〜2026年4月口コミ分析（67件）では、総合評価9.24点（10pt換算）、高評価率92.5%という結果が得られました。</a:t>
             </a:r>
             <a:endParaRPr lang="en-US" sz="1200" dirty="0"/>
           </a:p>
@@ -9180,7 +9180,7 @@
                           <a:ea typeface="Arial" pitchFamily="34" charset="-122"/>
                           <a:cs typeface="Arial" pitchFamily="34" charset="-120"/>
                         </a:rPr>
-                        <a:t>朝食はまあまあだったが、種類が少なく、毎日同じものだったので、数日もすれば飽きて</a:t>
+                        <a:t>朝食はまあまあだったが、種類が少なく、毎日同じものばかりだったので、数日もすれば</a:t>
                       </a:r>
                       <a:endParaRPr lang="en-US" sz="900" dirty="0">
                         <a:latin typeface="Arial" charset="0"/>
